--- a/scenarios/S04_sap_copa_report/deliverables/COPA_리포트_목업_덱.pptx
+++ b/scenarios/S04_sap_copa_report/deliverables/COPA_리포트_목업_덱.pptx
@@ -13,6 +13,12 @@
     <p:sldId id="261" r:id="rId12"/>
     <p:sldId id="262" r:id="rId13"/>
     <p:sldId id="263" r:id="rId14"/>
+    <p:sldId id="264" r:id="rId15"/>
+    <p:sldId id="265" r:id="rId16"/>
+    <p:sldId id="266" r:id="rId17"/>
+    <p:sldId id="267" r:id="rId18"/>
+    <p:sldId id="268" r:id="rId19"/>
+    <p:sldId id="269" r:id="rId20"/>
   </p:sldIdLst>
   <p:sldSz cx="9144000" cy="6858000" type="screen4x3"/>
   <p:notesSz cx="6858000" cy="9144000"/>
@@ -3145,6 +3151,450 @@
 </p:sld>
 </file>
 
+<file path=ppt/slides/slide10.xml><?xml version="1.0" encoding="utf-8"?>
+<p:sld xmlns:a="http://schemas.openxmlformats.org/drawingml/2006/main" xmlns:p="http://schemas.openxmlformats.org/presentationml/2006/main" xmlns:r="http://schemas.openxmlformats.org/officeDocument/2006/relationships">
+  <p:cSld>
+    <p:spTree>
+      <p:nvGrpSpPr>
+        <p:cNvPr id="1" name=""/>
+        <p:cNvGrpSpPr/>
+        <p:nvPr/>
+      </p:nvGrpSpPr>
+      <p:grpSpPr/>
+      <p:sp>
+        <p:nvSpPr>
+          <p:cNvPr id="2" name="Title 1"/>
+          <p:cNvSpPr>
+            <a:spLocks noGrp="1"/>
+          </p:cNvSpPr>
+          <p:nvPr>
+            <p:ph type="title"/>
+          </p:nvPr>
+        </p:nvSpPr>
+        <p:spPr/>
+        <p:txBody>
+          <a:bodyPr/>
+          <a:lstStyle/>
+          <a:p>
+            <a:r>
+              <a:t>변경 승인: Marketing Funnel 단계별 기여손익</a:t>
+            </a:r>
+          </a:p>
+        </p:txBody>
+      </p:sp>
+      <p:sp>
+        <p:nvSpPr>
+          <p:cNvPr id="3" name="Content Placeholder 2"/>
+          <p:cNvSpPr>
+            <a:spLocks noGrp="1"/>
+          </p:cNvSpPr>
+          <p:nvPr>
+            <p:ph idx="1"/>
+          </p:nvPr>
+        </p:nvSpPr>
+        <p:spPr/>
+        <p:txBody>
+          <a:bodyPr/>
+          <a:lstStyle/>
+          <a:p>
+            <a:r>
+              <a:t>CO-PA 리포트를 인지·고려·전환 단계 기준으로 재구성</a:t>
+            </a:r>
+          </a:p>
+          <a:p>
+            <a:pPr>
+              <a:defRPr sz="1400"/>
+            </a:pPr>
+            <a:r>
+              <a:t>매출·매출원가·직접비·공통 판관비·단계별 및 누적 기여손익 구분 표시</a:t>
+            </a:r>
+          </a:p>
+          <a:p>
+            <a:pPr>
+              <a:defRPr sz="1400"/>
+            </a:pPr>
+            <a:r>
+              <a:t>공통비 배부, 기존 CO-PA 대사, 데이터 완전성, 권한·컴플라이언스 기준은 후속 확정</a:t>
+            </a:r>
+          </a:p>
+        </p:txBody>
+      </p:sp>
+    </p:spTree>
+  </p:cSld>
+  <p:clrMapOvr>
+    <a:masterClrMapping/>
+  </p:clrMapOvr>
+</p:sld>
+</file>
+
+<file path=ppt/slides/slide11.xml><?xml version="1.0" encoding="utf-8"?>
+<p:sld xmlns:a="http://schemas.openxmlformats.org/drawingml/2006/main" xmlns:p="http://schemas.openxmlformats.org/presentationml/2006/main" xmlns:r="http://schemas.openxmlformats.org/officeDocument/2006/relationships">
+  <p:cSld>
+    <p:spTree>
+      <p:nvGrpSpPr>
+        <p:cNvPr id="1" name=""/>
+        <p:cNvGrpSpPr/>
+        <p:nvPr/>
+      </p:nvGrpSpPr>
+      <p:grpSpPr/>
+      <p:sp>
+        <p:nvSpPr>
+          <p:cNvPr id="2" name="Title 1"/>
+          <p:cNvSpPr>
+            <a:spLocks noGrp="1"/>
+          </p:cNvSpPr>
+          <p:nvPr>
+            <p:ph type="title"/>
+          </p:nvPr>
+        </p:nvSpPr>
+        <p:spPr/>
+        <p:txBody>
+          <a:bodyPr/>
+          <a:lstStyle/>
+          <a:p>
+            <a:r>
+              <a:t>변경 이력 — Marketing Funnel 단계별 CO-PA 손익</a:t>
+            </a:r>
+          </a:p>
+        </p:txBody>
+      </p:sp>
+      <p:sp>
+        <p:nvSpPr>
+          <p:cNvPr id="3" name="Content Placeholder 2"/>
+          <p:cNvSpPr>
+            <a:spLocks noGrp="1"/>
+          </p:cNvSpPr>
+          <p:nvPr>
+            <p:ph idx="1"/>
+          </p:nvPr>
+        </p:nvSpPr>
+        <p:spPr/>
+        <p:txBody>
+          <a:bodyPr/>
+          <a:lstStyle/>
+          <a:p>
+            <a:r>
+              <a:t>CO-PA 리포트를 인지·고려·전환 단계 중심으로 재구성</a:t>
+            </a:r>
+          </a:p>
+          <a:p>
+            <a:pPr>
+              <a:defRPr sz="1400"/>
+            </a:pPr>
+            <a:r>
+              <a:t>매출·매출원가·단계별 직접비·공통 판관비·단계별 및 누적 기여손익 표시</a:t>
+            </a:r>
+          </a:p>
+          <a:p>
+            <a:pPr>
+              <a:defRPr sz="1400"/>
+            </a:pPr>
+            <a:r>
+              <a:t>광고선전비·판매촉진비의 직접비·공통비 구분과 공통비 하단 배치</a:t>
+            </a:r>
+          </a:p>
+          <a:p>
+            <a:pPr>
+              <a:defRPr sz="1400"/>
+            </a:pPr>
+            <a:r>
+              <a:t>기존 CO-PA 대사, 데이터 완전성, 누락·추정 데이터, 권한·감사통제 기준은 후속 확정 과제로 관리</a:t>
+            </a:r>
+          </a:p>
+          <a:p>
+            <a:pPr>
+              <a:defRPr sz="1400"/>
+            </a:pPr>
+            <a:r>
+              <a:t>변경 기록: REQ-20260725-marketing-funnel-copa-approval-confirmed / GitHub 커밋 5c4bf0464eb8d39c56e55bbfcb6496a76e94b90c</a:t>
+            </a:r>
+          </a:p>
+        </p:txBody>
+      </p:sp>
+    </p:spTree>
+  </p:cSld>
+  <p:clrMapOvr>
+    <a:masterClrMapping/>
+  </p:clrMapOvr>
+</p:sld>
+</file>
+
+<file path=ppt/slides/slide12.xml><?xml version="1.0" encoding="utf-8"?>
+<p:sld xmlns:a="http://schemas.openxmlformats.org/drawingml/2006/main" xmlns:p="http://schemas.openxmlformats.org/presentationml/2006/main" xmlns:r="http://schemas.openxmlformats.org/officeDocument/2006/relationships">
+  <p:cSld>
+    <p:spTree>
+      <p:nvGrpSpPr>
+        <p:cNvPr id="1" name=""/>
+        <p:cNvGrpSpPr/>
+        <p:nvPr/>
+      </p:nvGrpSpPr>
+      <p:grpSpPr/>
+      <p:sp>
+        <p:nvSpPr>
+          <p:cNvPr id="2" name="Title 1"/>
+          <p:cNvSpPr>
+            <a:spLocks noGrp="1"/>
+          </p:cNvSpPr>
+          <p:nvPr>
+            <p:ph type="title"/>
+          </p:nvPr>
+        </p:nvSpPr>
+        <p:spPr/>
+        <p:txBody>
+          <a:bodyPr/>
+          <a:lstStyle/>
+          <a:p>
+            <a:r>
+              <a:t>변경사항 — REQ-20260725-marketing-funnel-copa-approval-execution</a:t>
+            </a:r>
+          </a:p>
+        </p:txBody>
+      </p:sp>
+      <p:sp>
+        <p:nvSpPr>
+          <p:cNvPr id="3" name="Content Placeholder 2"/>
+          <p:cNvSpPr>
+            <a:spLocks noGrp="1"/>
+          </p:cNvSpPr>
+          <p:nvPr>
+            <p:ph idx="1"/>
+          </p:nvPr>
+        </p:nvSpPr>
+        <p:spPr/>
+        <p:txBody>
+          <a:bodyPr/>
+          <a:lstStyle/>
+          <a:p>
+            <a:r>
+              <a:t>요청자: 경영관리 김PM · 결정: CO-PA 리포트 개편 및 관련 설계서·추적표·경영 보고 장표 갱신을 승인하고, 단계 정의·비용 배부·대사·데이터·권한·컴플라이언스 기준은 후속 확정 과제로 관리한다.</a:t>
+            </a:r>
+          </a:p>
+          <a:p>
+            <a:pPr>
+              <a:defRPr sz="1400"/>
+            </a:pPr>
+            <a:r>
+              <a:t>• CO-PA 리포트를 Marketing Funnel의 인지·고려·전환 단계별 구조로 개편한다.</a:t>
+            </a:r>
+          </a:p>
+          <a:p>
+            <a:pPr>
+              <a:defRPr sz="1400"/>
+            </a:pPr>
+            <a:r>
+              <a:t>• 각 퍼널 단계에 매출, 매출원가, 단계별 직접비, 공통 판관비 배부액을 구분 표시한다.</a:t>
+            </a:r>
+          </a:p>
+          <a:p>
+            <a:pPr>
+              <a:defRPr sz="1400"/>
+            </a:pPr>
+            <a:r>
+              <a:t>• 단계별 기여손익과 단계 간 누적 기여손익을 산출·표시하는 손익계산서 설계서를 신규 작성한다.</a:t>
+            </a:r>
+          </a:p>
+          <a:p>
+            <a:pPr>
+              <a:defRPr sz="1400"/>
+            </a:pPr>
+            <a:r>
+              <a:t>• 광고선전비와 판매촉진비를 퍼널 단계별 직접 귀속비 또는 공통비로 분류하고, 공통비는 기여이익 하단에 배치한다.</a:t>
+            </a:r>
+          </a:p>
+          <a:p>
+            <a:pPr>
+              <a:defRPr sz="1400"/>
+            </a:pPr>
+            <a:r>
+              <a:t>• 공통 판관비의 귀속·배부 기준과 기존 CO-PA 손익 및 신규 퍼널 손익 간 대사 기준을 문서화한다.</a:t>
+            </a:r>
+          </a:p>
+          <a:p>
+            <a:pPr>
+              <a:defRPr sz="1400"/>
+            </a:pPr>
+            <a:r>
+              <a:t>• CO-PA 특성·값필드와 손익계산서 항목 간 매핑 및 기간·조직·상품·서비스·고객·채널별 조회 차원을 정의한다.</a:t>
+            </a:r>
+          </a:p>
+        </p:txBody>
+      </p:sp>
+    </p:spTree>
+  </p:cSld>
+  <p:clrMapOvr>
+    <a:masterClrMapping/>
+  </p:clrMapOvr>
+</p:sld>
+</file>
+
+<file path=ppt/slides/slide13.xml><?xml version="1.0" encoding="utf-8"?>
+<p:sld xmlns:a="http://schemas.openxmlformats.org/drawingml/2006/main" xmlns:p="http://schemas.openxmlformats.org/presentationml/2006/main" xmlns:r="http://schemas.openxmlformats.org/officeDocument/2006/relationships">
+  <p:cSld>
+    <p:spTree>
+      <p:nvGrpSpPr>
+        <p:cNvPr id="1" name=""/>
+        <p:cNvGrpSpPr/>
+        <p:nvPr/>
+      </p:nvGrpSpPr>
+      <p:grpSpPr/>
+      <p:sp>
+        <p:nvSpPr>
+          <p:cNvPr id="2" name="Title 1"/>
+          <p:cNvSpPr>
+            <a:spLocks noGrp="1"/>
+          </p:cNvSpPr>
+          <p:nvPr>
+            <p:ph type="title"/>
+          </p:nvPr>
+        </p:nvSpPr>
+        <p:spPr/>
+        <p:txBody>
+          <a:bodyPr/>
+          <a:lstStyle/>
+          <a:p>
+            <a:r>
+              <a:t>변경 이력: Marketing Funnel 단계별 CO-PA 손익 구조</a:t>
+            </a:r>
+          </a:p>
+        </p:txBody>
+      </p:sp>
+      <p:sp>
+        <p:nvSpPr>
+          <p:cNvPr id="3" name="Content Placeholder 2"/>
+          <p:cNvSpPr>
+            <a:spLocks noGrp="1"/>
+          </p:cNvSpPr>
+          <p:nvPr>
+            <p:ph idx="1"/>
+          </p:nvPr>
+        </p:nvSpPr>
+        <p:spPr/>
+        <p:txBody>
+          <a:bodyPr/>
+          <a:lstStyle/>
+          <a:p>
+            <a:r>
+              <a:t>인지-관심-전환-유지 단계별 매출, 매출원가, 직접비 및 공통 판관비를 구분</a:t>
+            </a:r>
+          </a:p>
+          <a:p>
+            <a:pPr>
+              <a:defRPr sz="1400"/>
+            </a:pPr>
+            <a:r>
+              <a:t>단계별 기여손익과 단계 간 누적 기여손익을 산출·표시</a:t>
+            </a:r>
+          </a:p>
+          <a:p>
+            <a:pPr>
+              <a:defRPr sz="1400"/>
+            </a:pPr>
+            <a:r>
+              <a:t>광고선전비·판매촉진비의 직접 귀속 및 공통비 분류와 공통비 하단 배치 반영</a:t>
+            </a:r>
+          </a:p>
+          <a:p>
+            <a:pPr>
+              <a:defRPr sz="1400"/>
+            </a:pPr>
+            <a:r>
+              <a:t>CO-PA 특성·값필드 매핑, 조회 차원, 공통비 배부, 기존 손익과의 대사 기준 및 검증 시나리오 추가</a:t>
+            </a:r>
+          </a:p>
+          <a:p>
+            <a:pPr>
+              <a:defRPr sz="1400"/>
+            </a:pPr>
+            <a:r>
+              <a:t>단계 정의, 배부 기준, 대사 허용오차, 권한·컴플라이언스 및 cross-module 기준은 후속 확정</a:t>
+            </a:r>
+          </a:p>
+        </p:txBody>
+      </p:sp>
+    </p:spTree>
+  </p:cSld>
+  <p:clrMapOvr>
+    <a:masterClrMapping/>
+  </p:clrMapOvr>
+</p:sld>
+</file>
+
+<file path=ppt/slides/slide14.xml><?xml version="1.0" encoding="utf-8"?>
+<p:sld xmlns:a="http://schemas.openxmlformats.org/drawingml/2006/main" xmlns:p="http://schemas.openxmlformats.org/presentationml/2006/main" xmlns:r="http://schemas.openxmlformats.org/officeDocument/2006/relationships">
+  <p:cSld>
+    <p:spTree>
+      <p:nvGrpSpPr>
+        <p:cNvPr id="1" name=""/>
+        <p:cNvGrpSpPr/>
+        <p:nvPr/>
+      </p:nvGrpSpPr>
+      <p:grpSpPr/>
+      <p:sp>
+        <p:nvSpPr>
+          <p:cNvPr id="2" name="Title 1"/>
+          <p:cNvSpPr>
+            <a:spLocks noGrp="1"/>
+          </p:cNvSpPr>
+          <p:nvPr>
+            <p:ph type="title"/>
+          </p:nvPr>
+        </p:nvSpPr>
+        <p:spPr/>
+        <p:txBody>
+          <a:bodyPr/>
+          <a:lstStyle/>
+          <a:p>
+            <a:r>
+              <a:t>변경 이력: Marketing Funnel 단계별 CO-PA 기여손익</a:t>
+            </a:r>
+          </a:p>
+        </p:txBody>
+      </p:sp>
+      <p:sp>
+        <p:nvSpPr>
+          <p:cNvPr id="3" name="Content Placeholder 2"/>
+          <p:cNvSpPr>
+            <a:spLocks noGrp="1"/>
+          </p:cNvSpPr>
+          <p:nvPr>
+            <p:ph idx="1"/>
+          </p:nvPr>
+        </p:nvSpPr>
+        <p:spPr/>
+        <p:txBody>
+          <a:bodyPr/>
+          <a:lstStyle/>
+          <a:p>
+            <a:r>
+              <a:t>단계별 매출·매출원가·직접비·공통 판관비 배부액 및 누적 기여손익 구조 반영</a:t>
+            </a:r>
+          </a:p>
+          <a:p>
+            <a:pPr>
+              <a:defRPr sz="1400"/>
+            </a:pPr>
+            <a:r>
+              <a:t>직접 귀속비와 공통비 배부 기준, 기존 CO-PA·손익계산서 금액 대사 기준 관리</a:t>
+            </a:r>
+          </a:p>
+          <a:p>
+            <a:pPr>
+              <a:defRPr sz="1400"/>
+            </a:pPr>
+            <a:r>
+              <a:t>퍼널 단계·배부 기준·대사 허용오차·데이터 거버넌스·권한 및 컴플라이언스는 후속 확정 과제로 관리</a:t>
+            </a:r>
+          </a:p>
+        </p:txBody>
+      </p:sp>
+    </p:spTree>
+  </p:cSld>
+  <p:clrMapOvr>
+    <a:masterClrMapping/>
+  </p:clrMapOvr>
+</p:sld>
+</file>
+
 <file path=ppt/slides/slide2.xml><?xml version="1.0" encoding="utf-8"?>
 <p:sld xmlns:a="http://schemas.openxmlformats.org/drawingml/2006/main" xmlns:p="http://schemas.openxmlformats.org/presentationml/2006/main" xmlns:r="http://schemas.openxmlformats.org/officeDocument/2006/relationships">
   <p:cSld>
@@ -3347,7 +3797,7 @@
           <a:lstStyle/>
           <a:p>
             <a:r>
-              <a:t>인지-관심-전환-유지 4단계</a:t>
+              <a:t>인지·고려·전환 3단계</a:t>
             </a:r>
           </a:p>
           <a:p>
@@ -3487,7 +3937,7 @@
           <a:lstStyle/>
           <a:p>
             <a:r>
-              <a:t>퍼널×손익항목 매트릭스</a:t>
+              <a:t>인지·고려·전환 단계별 매출·원가·직접비·공통비·기여손익 매트릭스</a:t>
             </a:r>
           </a:p>
           <a:p>
@@ -3627,7 +4077,7 @@
           <a:lstStyle/>
           <a:p>
             <a:r>
-              <a:t>1개 분기 병행 운영</a:t>
+              <a:t>기존 CO-PA·손익계산서와 1개 분기 병행 운영 및 금액 대사</a:t>
             </a:r>
           </a:p>
           <a:p>
@@ -3638,6 +4088,90 @@
           <a:p>
             <a:r>
               <a:t>사용자 교육 및 매뉴얼 배포</a:t>
+            </a:r>
+          </a:p>
+        </p:txBody>
+      </p:sp>
+    </p:spTree>
+  </p:cSld>
+  <p:clrMapOvr>
+    <a:masterClrMapping/>
+  </p:clrMapOvr>
+</p:sld>
+</file>
+
+<file path=ppt/slides/slide9.xml><?xml version="1.0" encoding="utf-8"?>
+<p:sld xmlns:a="http://schemas.openxmlformats.org/drawingml/2006/main" xmlns:p="http://schemas.openxmlformats.org/presentationml/2006/main" xmlns:r="http://schemas.openxmlformats.org/officeDocument/2006/relationships">
+  <p:cSld>
+    <p:spTree>
+      <p:nvGrpSpPr>
+        <p:cNvPr id="1" name=""/>
+        <p:cNvGrpSpPr/>
+        <p:nvPr/>
+      </p:nvGrpSpPr>
+      <p:grpSpPr/>
+      <p:sp>
+        <p:nvSpPr>
+          <p:cNvPr id="2" name="Title 1"/>
+          <p:cNvSpPr>
+            <a:spLocks noGrp="1"/>
+          </p:cNvSpPr>
+          <p:nvPr>
+            <p:ph type="title"/>
+          </p:nvPr>
+        </p:nvSpPr>
+        <p:spPr/>
+        <p:txBody>
+          <a:bodyPr/>
+          <a:lstStyle/>
+          <a:p>
+            <a:r>
+              <a:t>변경 이력: Marketing Funnel 단계별 기여손익</a:t>
+            </a:r>
+          </a:p>
+        </p:txBody>
+      </p:sp>
+      <p:sp>
+        <p:nvSpPr>
+          <p:cNvPr id="3" name="Content Placeholder 2"/>
+          <p:cNvSpPr>
+            <a:spLocks noGrp="1"/>
+          </p:cNvSpPr>
+          <p:nvPr>
+            <p:ph idx="1"/>
+          </p:nvPr>
+        </p:nvSpPr>
+        <p:spPr/>
+        <p:txBody>
+          <a:bodyPr/>
+          <a:lstStyle/>
+          <a:p>
+            <a:r>
+              <a:t>단계별 매출·매출원가·직접비·배부 판관비 손익계산서 구조 반영</a:t>
+            </a:r>
+          </a:p>
+          <a:p>
+            <a:pPr>
+              <a:defRPr sz="1400"/>
+            </a:pPr>
+            <a:r>
+              <a:t>퍼널 단계별 및 누적 기여손익 비교 요건 추가</a:t>
+            </a:r>
+          </a:p>
+          <a:p>
+            <a:pPr>
+              <a:defRPr sz="1400"/>
+            </a:pPr>
+            <a:r>
+              <a:t>CO-PA 특성·값필드 매핑과 기간·조직·상품·고객·채널 분석 차원 반영</a:t>
+            </a:r>
+          </a:p>
+          <a:p>
+            <a:pPr>
+              <a:defRPr sz="1400"/>
+            </a:pPr>
+            <a:r>
+              <a:t>직접 귀속 판관비와 공통비 배부 기준 및 기존 리포트 대사 과제 명시</a:t>
             </a:r>
           </a:p>
         </p:txBody>
